--- a/.agents/skills/p-ppt-academic/assets/reference-deck.pptx
+++ b/.agents/skills/p-ppt-academic/assets/reference-deck.pptx
@@ -9928,7 +9928,7 @@
                 <a:latin typeface="微软雅黑" panose="020B0503020204020204" pitchFamily="34" charset="-122"/>
                 <a:ea typeface="微软雅黑" panose="020B0503020204020204" pitchFamily="34" charset="-122"/>
               </a:rPr>
-              <a:t>水凝胶粘接失效的速率效应研究</a:t>
+              <a:t>材料界面失效的速率效应研究</a:t>
             </a:r>
           </a:p>
         </p:txBody>
@@ -10367,7 +10367,7 @@
                   <a:latin typeface="微软雅黑" panose="020B0503020204020204" pitchFamily="34" charset="-122"/>
                   <a:ea typeface="微软雅黑" panose="020B0503020204020204" pitchFamily="34" charset="-122"/>
                 </a:rPr>
-                <a:t>答辩人：尹道晨</a:t>
+                <a:t>答辩人：张三</a:t>
               </a:r>
               <a:endParaRPr lang="en-US" altLang="zh-CN" sz="2800" b="1" dirty="0">
                 <a:solidFill>
@@ -10420,7 +10420,7 @@
                 <a:latin typeface="微软雅黑" panose="020B0503020204020204" pitchFamily="34" charset="-122"/>
                 <a:ea typeface="微软雅黑" panose="020B0503020204020204" pitchFamily="34" charset="-122"/>
               </a:rPr>
-              <a:t>2026</a:t>
+              <a:t>20XX年X月X日</a:t>
             </a:r>
             <a:r>
               <a:rPr lang="zh-CN" altLang="en-US" sz="2400" b="1" dirty="0">
@@ -10433,7 +10433,7 @@
                 <a:latin typeface="微软雅黑" panose="020B0503020204020204" pitchFamily="34" charset="-122"/>
                 <a:ea typeface="微软雅黑" panose="020B0503020204020204" pitchFamily="34" charset="-122"/>
               </a:rPr>
-              <a:t>年</a:t>
+              <a:t/>
             </a:r>
             <a:r>
               <a:rPr lang="en-US" altLang="zh-CN" sz="2400" b="1" dirty="0">
@@ -10446,7 +10446,7 @@
                 <a:latin typeface="微软雅黑" panose="020B0503020204020204" pitchFamily="34" charset="-122"/>
                 <a:ea typeface="微软雅黑" panose="020B0503020204020204" pitchFamily="34" charset="-122"/>
               </a:rPr>
-              <a:t>9</a:t>
+              <a:t/>
             </a:r>
             <a:r>
               <a:rPr lang="zh-CN" altLang="en-US" sz="2400" b="1" dirty="0">
@@ -10459,7 +10459,7 @@
                 <a:latin typeface="微软雅黑" panose="020B0503020204020204" pitchFamily="34" charset="-122"/>
                 <a:ea typeface="微软雅黑" panose="020B0503020204020204" pitchFamily="34" charset="-122"/>
               </a:rPr>
-              <a:t>月</a:t>
+              <a:t/>
             </a:r>
             <a:r>
               <a:rPr lang="en-US" altLang="zh-CN" sz="2400" b="1" dirty="0">
@@ -10472,7 +10472,7 @@
                 <a:latin typeface="微软雅黑" panose="020B0503020204020204" pitchFamily="34" charset="-122"/>
                 <a:ea typeface="微软雅黑" panose="020B0503020204020204" pitchFamily="34" charset="-122"/>
               </a:rPr>
-              <a:t>4</a:t>
+              <a:t/>
             </a:r>
             <a:r>
               <a:rPr lang="zh-CN" altLang="en-US" sz="2400" b="1" dirty="0">
@@ -10485,7 +10485,7 @@
                 <a:latin typeface="微软雅黑" panose="020B0503020204020204" pitchFamily="34" charset="-122"/>
                 <a:ea typeface="微软雅黑" panose="020B0503020204020204" pitchFamily="34" charset="-122"/>
               </a:rPr>
-              <a:t>日</a:t>
+              <a:t/>
             </a:r>
           </a:p>
         </p:txBody>
@@ -10736,7 +10736,7 @@
                   <a:latin typeface="微软雅黑" panose="020B0503020204020204" pitchFamily="34" charset="-122"/>
                   <a:ea typeface="微软雅黑" panose="020B0503020204020204" pitchFamily="34" charset="-122"/>
                 </a:rPr>
-                <a:t>指导老师：贾铮</a:t>
+                <a:t>指导老师：李四</a:t>
               </a:r>
               <a:endParaRPr lang="en-US" altLang="zh-CN" sz="2800" b="1" dirty="0">
                 <a:solidFill>
@@ -12339,7 +12339,7 @@
                 <a:latin typeface="微软雅黑" panose="020B0503020204020204" pitchFamily="34" charset="-122"/>
                 <a:ea typeface="微软雅黑" panose="020B0503020204020204" pitchFamily="34" charset="-122"/>
               </a:rPr>
-              <a:t>2026</a:t>
+              <a:t>20XX年X月X日</a:t>
             </a:r>
             <a:r>
               <a:rPr lang="zh-CN" altLang="en-US" sz="2400" b="1" dirty="0">
@@ -12352,7 +12352,7 @@
                 <a:latin typeface="微软雅黑" panose="020B0503020204020204" pitchFamily="34" charset="-122"/>
                 <a:ea typeface="微软雅黑" panose="020B0503020204020204" pitchFamily="34" charset="-122"/>
               </a:rPr>
-              <a:t>年</a:t>
+              <a:t/>
             </a:r>
             <a:r>
               <a:rPr lang="en-US" altLang="zh-CN" sz="2400" b="1" dirty="0">
@@ -12365,7 +12365,7 @@
                 <a:latin typeface="微软雅黑" panose="020B0503020204020204" pitchFamily="34" charset="-122"/>
                 <a:ea typeface="微软雅黑" panose="020B0503020204020204" pitchFamily="34" charset="-122"/>
               </a:rPr>
-              <a:t>9</a:t>
+              <a:t/>
             </a:r>
             <a:r>
               <a:rPr lang="zh-CN" altLang="en-US" sz="2400" b="1" dirty="0">
@@ -12378,7 +12378,7 @@
                 <a:latin typeface="微软雅黑" panose="020B0503020204020204" pitchFamily="34" charset="-122"/>
                 <a:ea typeface="微软雅黑" panose="020B0503020204020204" pitchFamily="34" charset="-122"/>
               </a:rPr>
-              <a:t>月</a:t>
+              <a:t/>
             </a:r>
             <a:r>
               <a:rPr lang="en-US" altLang="zh-CN" sz="2400" b="1" dirty="0">
@@ -12391,7 +12391,7 @@
                 <a:latin typeface="微软雅黑" panose="020B0503020204020204" pitchFamily="34" charset="-122"/>
                 <a:ea typeface="微软雅黑" panose="020B0503020204020204" pitchFamily="34" charset="-122"/>
               </a:rPr>
-              <a:t>4</a:t>
+              <a:t/>
             </a:r>
             <a:r>
               <a:rPr lang="zh-CN" altLang="en-US" sz="2400" b="1" dirty="0">
@@ -12404,7 +12404,7 @@
                 <a:latin typeface="微软雅黑" panose="020B0503020204020204" pitchFamily="34" charset="-122"/>
                 <a:ea typeface="微软雅黑" panose="020B0503020204020204" pitchFamily="34" charset="-122"/>
               </a:rPr>
-              <a:t>日</a:t>
+              <a:t/>
             </a:r>
           </a:p>
         </p:txBody>
@@ -12655,7 +12655,7 @@
                   <a:latin typeface="微软雅黑" panose="020B0503020204020204" pitchFamily="34" charset="-122"/>
                   <a:ea typeface="微软雅黑" panose="020B0503020204020204" pitchFamily="34" charset="-122"/>
                 </a:rPr>
-                <a:t>答辩人：尹道晨</a:t>
+                <a:t>答辩人：张三</a:t>
               </a:r>
               <a:endParaRPr lang="en-US" altLang="zh-CN" sz="2800" b="1" dirty="0">
                 <a:solidFill>
@@ -12867,7 +12867,7 @@
                   <a:latin typeface="微软雅黑" panose="020B0503020204020204" pitchFamily="34" charset="-122"/>
                   <a:ea typeface="微软雅黑" panose="020B0503020204020204" pitchFamily="34" charset="-122"/>
                 </a:rPr>
-                <a:t>指导老师：贾铮</a:t>
+                <a:t>指导老师：李四</a:t>
               </a:r>
               <a:endParaRPr lang="en-US" altLang="zh-CN" sz="2800" b="1" dirty="0">
                 <a:solidFill>
@@ -14998,7 +14998,7 @@
                   <a:latin typeface="微软雅黑" panose="020B0503020204020204" pitchFamily="34" charset="-122"/>
                   <a:ea typeface="微软雅黑" panose="020B0503020204020204" pitchFamily="34" charset="-122"/>
                 </a:rPr>
-                <a:t>非共价粘接水凝胶搭接剪切失效的速率相关行为</a:t>
+                <a:t>界面失效模式一的速率相关行为</a:t>
               </a:r>
             </a:p>
           </p:txBody>
@@ -15626,7 +15626,7 @@
                   <a:latin typeface="微软雅黑" panose="020B0503020204020204" pitchFamily="34" charset="-122"/>
                   <a:ea typeface="微软雅黑" panose="020B0503020204020204" pitchFamily="34" charset="-122"/>
                 </a:rPr>
-                <a:t>水凝胶</a:t>
+                <a:t>材料–基底界面剪切脱粘的速率相关行为</a:t>
               </a:r>
               <a:r>
                 <a:rPr lang="en-US" altLang="zh-CN" sz="2800" b="1" dirty="0">
@@ -15636,7 +15636,7 @@
                   <a:latin typeface="微软雅黑" panose="020B0503020204020204" pitchFamily="34" charset="-122"/>
                   <a:ea typeface="微软雅黑" panose="020B0503020204020204" pitchFamily="34" charset="-122"/>
                 </a:rPr>
-                <a:t>–</a:t>
+                <a:t/>
               </a:r>
               <a:r>
                 <a:rPr lang="zh-CN" altLang="en-US" sz="2800" b="1" dirty="0">
@@ -15646,7 +15646,7 @@
                   <a:latin typeface="微软雅黑" panose="020B0503020204020204" pitchFamily="34" charset="-122"/>
                   <a:ea typeface="微软雅黑" panose="020B0503020204020204" pitchFamily="34" charset="-122"/>
                 </a:rPr>
-                <a:t>刚性基底非共价粘接剪切脱粘的速率相关行为</a:t>
+                <a:t/>
               </a:r>
             </a:p>
           </p:txBody>
@@ -16274,7 +16274,7 @@
                   <a:latin typeface="微软雅黑" panose="020B0503020204020204" pitchFamily="34" charset="-122"/>
                   <a:ea typeface="微软雅黑" panose="020B0503020204020204" pitchFamily="34" charset="-122"/>
                 </a:rPr>
-                <a:t>非共价粘接水凝胶</a:t>
+                <a:t>界面剥离失效的速率相关行为</a:t>
               </a:r>
               <a:r>
                 <a:rPr lang="en-US" altLang="zh-CN" sz="2800" b="1" dirty="0">
@@ -16284,7 +16284,7 @@
                   <a:latin typeface="微软雅黑" panose="020B0503020204020204" pitchFamily="34" charset="-122"/>
                   <a:ea typeface="微软雅黑" panose="020B0503020204020204" pitchFamily="34" charset="-122"/>
                 </a:rPr>
-                <a:t>180°</a:t>
+                <a:t/>
               </a:r>
               <a:r>
                 <a:rPr lang="zh-CN" altLang="en-US" sz="2800" b="1" dirty="0">
@@ -16294,7 +16294,7 @@
                   <a:latin typeface="微软雅黑" panose="020B0503020204020204" pitchFamily="34" charset="-122"/>
                   <a:ea typeface="微软雅黑" panose="020B0503020204020204" pitchFamily="34" charset="-122"/>
                 </a:rPr>
-                <a:t>剥离失效的速率相关行为</a:t>
+                <a:t/>
               </a:r>
             </a:p>
           </p:txBody>
@@ -16922,7 +16922,7 @@
                   <a:latin typeface="微软雅黑" panose="020B0503020204020204" pitchFamily="34" charset="-122"/>
                   <a:ea typeface="微软雅黑" panose="020B0503020204020204" pitchFamily="34" charset="-122"/>
                 </a:rPr>
-                <a:t>水凝胶柔软可拉伸粘接方法及其失效的速率无关行为</a:t>
+                <a:t>柔软可拉伸粘接方法及其速率无关行为</a:t>
               </a:r>
             </a:p>
           </p:txBody>
@@ -21377,7 +21377,7 @@
                 <a:latin typeface="黑体" panose="02010609060101010101" pitchFamily="49" charset="-122"/>
                 <a:ea typeface="黑体" panose="02010609060101010101" pitchFamily="49" charset="-122"/>
               </a:rPr>
-              <a:t>水凝胶粘接失效的速率效应研究</a:t>
+              <a:t>材料界面失效的速率效应研究</a:t>
             </a:r>
             <a:endParaRPr lang="zh-CN" altLang="zh-CN" sz="2400" b="1" dirty="0">
               <a:solidFill>
@@ -21593,7 +21593,7 @@
                 <a:ea typeface="黑体" panose="02010609060101010101" pitchFamily="49" charset="-122"/>
                 <a:cs typeface="Times New Roman" panose="02020603050405020304" pitchFamily="18" charset="0"/>
               </a:rPr>
-              <a:t>PAA</a:t>
+              <a:t/>
             </a:r>
             <a:endParaRPr lang="zh-CN" altLang="en-US" sz="1000" dirty="0"/>
           </a:p>
@@ -21635,7 +21635,7 @@
                 </a:solidFill>
                 <a:latin typeface="Microsoft YaHei"/>
               </a:rPr>
-              <a:t>速率稳定的柔软可拉伸拓扑粘接策略</a:t>
+              <a:t>速率稳定的柔软可拉伸粘接策略</a:t>
             </a:r>
             <a:endParaRPr lang="zh-CN" altLang="zh-CN" sz="2000" b="1" dirty="0">
               <a:solidFill>
@@ -21683,7 +21683,7 @@
                 </a:solidFill>
                 <a:latin typeface="Microsoft YaHei"/>
               </a:rPr>
-              <a:t>非共价粘接界面速率相关失效机制与理论建模</a:t>
+              <a:t>界面速率相关失效机制与理论建模</a:t>
             </a:r>
             <a:endParaRPr lang="zh-CN" altLang="zh-CN" sz="2000" b="1" dirty="0">
               <a:solidFill>
@@ -21776,7 +21776,7 @@
                 </a:solidFill>
                 <a:latin typeface="Microsoft YaHei"/>
               </a:rPr>
-              <a:t>非共价粘接双层水凝胶搭接剪切失效</a:t>
+              <a:t>界面失效模式一</a:t>
             </a:r>
           </a:p>
         </p:txBody>
@@ -21860,7 +21860,7 @@
                 </a:solidFill>
                 <a:latin typeface="Microsoft YaHei"/>
               </a:rPr>
-              <a:t>水凝胶–刚性基底剪切脱粘失效</a:t>
+              <a:t>材料–基底界面剪切脱粘失效</a:t>
             </a:r>
           </a:p>
         </p:txBody>
@@ -22389,7 +22389,7 @@
                 </a:solidFill>
                 <a:latin typeface="Microsoft YaHei"/>
               </a:rPr>
-              <a:t>非共价粘接水凝胶180°剥离失效</a:t>
+              <a:t>界面剥离失效</a:t>
             </a:r>
           </a:p>
         </p:txBody>
@@ -22469,7 +22469,7 @@
                 </a:solidFill>
                 <a:latin typeface="Microsoft YaHei"/>
               </a:rPr>
-              <a:t>水凝胶柔软可拉伸拓扑粘接方法及应用</a:t>
+              <a:t>柔软可拉伸粘接方法及应用</a:t>
             </a:r>
           </a:p>
         </p:txBody>
@@ -25491,7 +25491,7 @@
                   <a:latin typeface="微软雅黑" panose="020B0503020204020204" pitchFamily="34" charset="-122"/>
                   <a:ea typeface="微软雅黑" panose="020B0503020204020204" pitchFamily="34" charset="-122"/>
                 </a:rPr>
-                <a:t>非共价粘接水凝胶搭接剪切失效的速率相关行为</a:t>
+                <a:t>界面失效模式一的速率相关行为</a:t>
               </a:r>
             </a:p>
           </p:txBody>
@@ -26790,7 +26790,7 @@
                   <a:latin typeface="微软雅黑" panose="020B0503020204020204" pitchFamily="34" charset="-122"/>
                   <a:ea typeface="微软雅黑" panose="020B0503020204020204" pitchFamily="34" charset="-122"/>
                 </a:rPr>
-                <a:t>水凝胶</a:t>
+                <a:t>材料–基底界面剪切脱粘的速率相关行为</a:t>
               </a:r>
               <a:r>
                 <a:rPr lang="en-US" altLang="zh-CN" sz="2800" b="1" dirty="0">
@@ -26800,7 +26800,7 @@
                   <a:latin typeface="微软雅黑" panose="020B0503020204020204" pitchFamily="34" charset="-122"/>
                   <a:ea typeface="微软雅黑" panose="020B0503020204020204" pitchFamily="34" charset="-122"/>
                 </a:rPr>
-                <a:t>–</a:t>
+                <a:t/>
               </a:r>
               <a:r>
                 <a:rPr lang="zh-CN" altLang="en-US" sz="2800" b="1" dirty="0">
@@ -26810,7 +26810,7 @@
                   <a:latin typeface="微软雅黑" panose="020B0503020204020204" pitchFamily="34" charset="-122"/>
                   <a:ea typeface="微软雅黑" panose="020B0503020204020204" pitchFamily="34" charset="-122"/>
                 </a:rPr>
-                <a:t>刚性基底非共价粘接剪切脱粘的速率相关行为</a:t>
+                <a:t/>
               </a:r>
             </a:p>
           </p:txBody>
@@ -27438,7 +27438,7 @@
                   <a:latin typeface="微软雅黑" panose="020B0503020204020204" pitchFamily="34" charset="-122"/>
                   <a:ea typeface="微软雅黑" panose="020B0503020204020204" pitchFamily="34" charset="-122"/>
                 </a:rPr>
-                <a:t>非共价粘接水凝胶</a:t>
+                <a:t>界面剥离失效的速率相关行为</a:t>
               </a:r>
               <a:r>
                 <a:rPr lang="en-US" altLang="zh-CN" sz="2800" b="1" dirty="0">
@@ -27448,7 +27448,7 @@
                   <a:latin typeface="微软雅黑" panose="020B0503020204020204" pitchFamily="34" charset="-122"/>
                   <a:ea typeface="微软雅黑" panose="020B0503020204020204" pitchFamily="34" charset="-122"/>
                 </a:rPr>
-                <a:t>180°</a:t>
+                <a:t/>
               </a:r>
               <a:r>
                 <a:rPr lang="zh-CN" altLang="en-US" sz="2800" b="1" dirty="0">
@@ -27458,7 +27458,7 @@
                   <a:latin typeface="微软雅黑" panose="020B0503020204020204" pitchFamily="34" charset="-122"/>
                   <a:ea typeface="微软雅黑" panose="020B0503020204020204" pitchFamily="34" charset="-122"/>
                 </a:rPr>
-                <a:t>剥离失效的速率相关行为</a:t>
+                <a:t/>
               </a:r>
             </a:p>
           </p:txBody>
@@ -28086,7 +28086,7 @@
                   <a:latin typeface="微软雅黑" panose="020B0503020204020204" pitchFamily="34" charset="-122"/>
                   <a:ea typeface="微软雅黑" panose="020B0503020204020204" pitchFamily="34" charset="-122"/>
                 </a:rPr>
-                <a:t>水凝胶柔软可拉伸粘接方法及其失效的速率无关行为</a:t>
+                <a:t>柔软可拉伸粘接方法及其速率无关行为</a:t>
               </a:r>
             </a:p>
           </p:txBody>
@@ -30916,7 +30916,7 @@
                 <a:ea typeface="微软雅黑" panose="020B0503020204020204" pitchFamily="34" charset="-122"/>
                 <a:cs typeface="+mn-cs"/>
               </a:rPr>
-              <a:t>非共价粘接水凝胶搭接剪切失效的速率相关行为</a:t>
+              <a:t>界面失效模式一的速率相关行为</a:t>
             </a:r>
           </a:p>
         </p:txBody>
@@ -32159,7 +32159,7 @@
                 <a:ea typeface="微软雅黑" panose="020B0503020204020204" pitchFamily="34" charset="-122"/>
                 <a:cs typeface="+mn-cs"/>
               </a:rPr>
-              <a:t>水凝胶柔软可拉伸粘接方法及其失效的速率无关行为</a:t>
+              <a:t>柔软可拉伸粘接方法及其速率无关行为</a:t>
             </a:r>
           </a:p>
         </p:txBody>
@@ -34294,7 +34294,7 @@
                 <a:ea typeface="微软雅黑" panose="020B0503020204020204" pitchFamily="34" charset="-122"/>
                 <a:cs typeface="+mn-cs"/>
               </a:rPr>
-              <a:t>水凝胶粘接失效的速率效应研究</a:t>
+              <a:t>材料界面失效的速率效应研究</a:t>
             </a:r>
           </a:p>
         </p:txBody>
@@ -34576,14 +34576,14 @@
                 <a:latin typeface="微软雅黑" panose="020B0503020204020204" pitchFamily="34" charset="-122"/>
                 <a:ea typeface="微软雅黑" panose="020B0503020204020204" pitchFamily="34" charset="-122"/>
               </a:rPr>
-              <a:t>构建</a:t>
+              <a:t>构建界面失效模式一的测试力学理论</a:t>
             </a:r>
             <a:r>
               <a:rPr lang="zh-CN" altLang="en-US" sz="1600" b="1" dirty="0">
                 <a:latin typeface="微软雅黑" panose="020B0503020204020204" pitchFamily="34" charset="-122"/>
                 <a:ea typeface="微软雅黑" panose="020B0503020204020204" pitchFamily="34" charset="-122"/>
               </a:rPr>
-              <a:t>水凝胶非共价粘接的搭接剪切测试力学理论</a:t>
+              <a:t/>
             </a:r>
             <a:endParaRPr lang="en-US" altLang="zh-CN" sz="1600" b="1" dirty="0">
               <a:latin typeface="微软雅黑" panose="020B0503020204020204" pitchFamily="34" charset="-122"/>
@@ -35763,7 +35763,7 @@
                 <a:latin typeface="微软雅黑" panose="020B0503020204020204" pitchFamily="34" charset="-122"/>
                 <a:ea typeface="微软雅黑" panose="020B0503020204020204" pitchFamily="34" charset="-122"/>
               </a:rPr>
-              <a:t>建立水凝胶</a:t>
+              <a:t>建立材料–基底界面剪切脱粘力学理论</a:t>
             </a:r>
             <a:r>
               <a:rPr lang="en-US" altLang="zh-CN" sz="1600" b="1" dirty="0">
@@ -35776,7 +35776,7 @@
                 <a:latin typeface="微软雅黑" panose="020B0503020204020204" pitchFamily="34" charset="-122"/>
                 <a:ea typeface="微软雅黑" panose="020B0503020204020204" pitchFamily="34" charset="-122"/>
               </a:rPr>
-              <a:t>–</a:t>
+              <a:t/>
             </a:r>
             <a:r>
               <a:rPr lang="zh-CN" altLang="en-US" sz="1600" b="1" dirty="0">
@@ -35789,7 +35789,7 @@
                 <a:latin typeface="微软雅黑" panose="020B0503020204020204" pitchFamily="34" charset="-122"/>
                 <a:ea typeface="微软雅黑" panose="020B0503020204020204" pitchFamily="34" charset="-122"/>
               </a:rPr>
-              <a:t>刚性基底非共价粘接剪切脱粘力学理论</a:t>
+              <a:t/>
             </a:r>
           </a:p>
         </p:txBody>
@@ -35956,7 +35956,7 @@
                 <a:latin typeface="微软雅黑" panose="020B0503020204020204" pitchFamily="34" charset="-122"/>
                 <a:ea typeface="微软雅黑" panose="020B0503020204020204" pitchFamily="34" charset="-122"/>
               </a:rPr>
-              <a:t>构建非共价粘接水凝胶</a:t>
+              <a:t>构建界面剥离失效力学理论</a:t>
             </a:r>
             <a:r>
               <a:rPr lang="en-US" altLang="zh-CN" sz="1600" b="1" dirty="0">
@@ -35969,7 +35969,7 @@
                 <a:latin typeface="微软雅黑" panose="020B0503020204020204" pitchFamily="34" charset="-122"/>
                 <a:ea typeface="微软雅黑" panose="020B0503020204020204" pitchFamily="34" charset="-122"/>
               </a:rPr>
-              <a:t>180°</a:t>
+              <a:t/>
             </a:r>
             <a:r>
               <a:rPr lang="zh-CN" altLang="en-US" sz="1600" b="1" dirty="0">
@@ -35982,7 +35982,7 @@
                 <a:latin typeface="微软雅黑" panose="020B0503020204020204" pitchFamily="34" charset="-122"/>
                 <a:ea typeface="微软雅黑" panose="020B0503020204020204" pitchFamily="34" charset="-122"/>
               </a:rPr>
-              <a:t>剥离力学理论</a:t>
+              <a:t/>
             </a:r>
           </a:p>
         </p:txBody>
@@ -36149,7 +36149,7 @@
                 <a:latin typeface="微软雅黑" panose="020B0503020204020204" pitchFamily="34" charset="-122"/>
                 <a:ea typeface="微软雅黑" panose="020B0503020204020204" pitchFamily="34" charset="-122"/>
               </a:rPr>
-              <a:t>通过拓扑缠结显著提高粘附能并保持被粘水凝胶柔软性</a:t>
+              <a:t>提出改进粘接方法并保持基体柔软性</a:t>
             </a:r>
           </a:p>
         </p:txBody>
@@ -36602,7 +36602,7 @@
                 <a:ea typeface="Arial Unicode MS" panose="020B0604020202020204" pitchFamily="34" charset="-122"/>
                 <a:cs typeface="Times New Roman" panose="02020603050405020304" pitchFamily="18" charset="0"/>
               </a:rPr>
-              <a:t>Yin D</a:t>
+              <a:t>Author A, Author B, Author C, et al. 占位条目：本页版式用于罗列读博期间主要成果，换成自己的文献即可[J]. Journal of Placeholder Mechanics, 20XX, 00: 000000.</a:t>
             </a:r>
             <a:r>
               <a:rPr lang="en-US" altLang="zh-CN" kern="100" dirty="0">
@@ -36610,7 +36610,7 @@
                 <a:ea typeface="Arial Unicode MS" panose="020B0604020202020204" pitchFamily="34" charset="-122"/>
                 <a:cs typeface="Times New Roman" panose="02020603050405020304" pitchFamily="18" charset="0"/>
               </a:rPr>
-              <a:t>, Bai J, Shen Z, et al. A coupled viscoelastic-damage model for rate-dependent noncovalent hydrogel adhesion under lap shear: theory and experiments[J]. </a:t>
+              <a:t/>
             </a:r>
             <a:r>
               <a:rPr lang="en-US" altLang="zh-CN" b="1" i="1" kern="100" dirty="0">
@@ -36621,7 +36621,7 @@
                 <a:ea typeface="Arial Unicode MS" panose="020B0604020202020204" pitchFamily="34" charset="-122"/>
                 <a:cs typeface="Times New Roman" panose="02020603050405020304" pitchFamily="18" charset="0"/>
               </a:rPr>
-              <a:t>Journal of the Mechanics and Physics of Solids</a:t>
+              <a:t/>
             </a:r>
             <a:r>
               <a:rPr lang="en-US" altLang="zh-CN" kern="100" dirty="0">
@@ -36629,7 +36629,7 @@
                 <a:ea typeface="Arial Unicode MS" panose="020B0604020202020204" pitchFamily="34" charset="-122"/>
                 <a:cs typeface="Times New Roman" panose="02020603050405020304" pitchFamily="18" charset="0"/>
               </a:rPr>
-              <a:t>, 2026, 211: 106562.</a:t>
+              <a:t/>
             </a:r>
           </a:p>
           <a:p>
@@ -36647,7 +36647,7 @@
                 <a:ea typeface="Arial Unicode MS" panose="020B0604020202020204" pitchFamily="34" charset="-122"/>
                 <a:cs typeface="Times New Roman" panose="02020603050405020304" pitchFamily="18" charset="0"/>
               </a:rPr>
-              <a:t>Yin D</a:t>
+              <a:t>Author A, Author D, et al. 占位条目：一作成果建议加粗作者名，期刊名用蓝色斜体[J]. Placeholder Letters, 20XX, 00: 000000.</a:t>
             </a:r>
             <a:r>
               <a:rPr lang="en-US" altLang="zh-CN" sz="1800" kern="100" dirty="0">
@@ -36656,7 +36656,7 @@
                 <a:ea typeface="Arial Unicode MS" panose="020B0604020202020204" pitchFamily="34" charset="-122"/>
                 <a:cs typeface="Times New Roman" panose="02020603050405020304" pitchFamily="18" charset="0"/>
               </a:rPr>
-              <a:t>, Ma J, Shen Z, et al. Soft stretchable topological adhesion of hydrogels[J]. </a:t>
+              <a:t/>
             </a:r>
             <a:r>
               <a:rPr lang="en-US" altLang="zh-CN" sz="1800" b="1" i="1" kern="100" dirty="0">
@@ -36668,7 +36668,7 @@
                 <a:ea typeface="Arial Unicode MS" panose="020B0604020202020204" pitchFamily="34" charset="-122"/>
                 <a:cs typeface="Times New Roman" panose="02020603050405020304" pitchFamily="18" charset="0"/>
               </a:rPr>
-              <a:t>Extreme Mechanics Letters</a:t>
+              <a:t/>
             </a:r>
             <a:r>
               <a:rPr lang="en-US" altLang="zh-CN" sz="1800" kern="100" dirty="0">
@@ -36677,7 +36677,7 @@
                 <a:ea typeface="Arial Unicode MS" panose="020B0604020202020204" pitchFamily="34" charset="-122"/>
                 <a:cs typeface="Times New Roman" panose="02020603050405020304" pitchFamily="18" charset="0"/>
               </a:rPr>
-              <a:t>, 2025, 78: 102373.</a:t>
+              <a:t/>
             </a:r>
           </a:p>
           <a:p>
@@ -36695,7 +36695,7 @@
                 <a:ea typeface="Arial Unicode MS" panose="020B0604020202020204" pitchFamily="34" charset="-122"/>
                 <a:cs typeface="Times New Roman" panose="02020603050405020304" pitchFamily="18" charset="0"/>
               </a:rPr>
-              <a:t>Yin D</a:t>
+              <a:t>Author E*, Author A*, et al. 占位条目：共同一作用星号标注[J]. International Journal of Placeholder Science, 20XX, 00: 000000.</a:t>
             </a:r>
             <a:r>
               <a:rPr lang="en-US" altLang="zh-CN" sz="1800" kern="100" dirty="0">
@@ -36704,7 +36704,7 @@
                 <a:ea typeface="Arial Unicode MS" panose="020B0604020202020204" pitchFamily="34" charset="-122"/>
                 <a:cs typeface="Times New Roman" panose="02020603050405020304" pitchFamily="18" charset="0"/>
               </a:rPr>
-              <a:t>, Yan S, Bai J, et al. Rate-Dependent Shear Debonding of Hydrogels from Rigid Substrates via Noncovalent Adhesion: Simulations and Experiments[J]. </a:t>
+              <a:t/>
             </a:r>
             <a:r>
               <a:rPr lang="en-US" altLang="zh-CN" sz="1800" b="1" i="1" kern="100" dirty="0">
@@ -36716,7 +36716,7 @@
                 <a:ea typeface="Arial Unicode MS" panose="020B0604020202020204" pitchFamily="34" charset="-122"/>
                 <a:cs typeface="Times New Roman" panose="02020603050405020304" pitchFamily="18" charset="0"/>
               </a:rPr>
-              <a:t>Acta </a:t>
+              <a:t/>
             </a:r>
             <a:r>
               <a:rPr lang="en-US" altLang="zh-CN" sz="1800" b="1" i="1" kern="100" dirty="0" err="1">
@@ -36728,7 +36728,7 @@
                 <a:ea typeface="Arial Unicode MS" panose="020B0604020202020204" pitchFamily="34" charset="-122"/>
                 <a:cs typeface="Times New Roman" panose="02020603050405020304" pitchFamily="18" charset="0"/>
               </a:rPr>
-              <a:t>Mechanica</a:t>
+              <a:t/>
             </a:r>
             <a:r>
               <a:rPr lang="en-US" altLang="zh-CN" sz="1800" b="1" i="1" kern="100" dirty="0">
@@ -36740,7 +36740,7 @@
                 <a:ea typeface="Arial Unicode MS" panose="020B0604020202020204" pitchFamily="34" charset="-122"/>
                 <a:cs typeface="Times New Roman" panose="02020603050405020304" pitchFamily="18" charset="0"/>
               </a:rPr>
-              <a:t> Sinica</a:t>
+              <a:t/>
             </a:r>
             <a:r>
               <a:rPr lang="en-US" altLang="zh-CN" sz="1800" kern="100" dirty="0">
@@ -36749,7 +36749,7 @@
                 <a:ea typeface="Arial Unicode MS" panose="020B0604020202020204" pitchFamily="34" charset="-122"/>
                 <a:cs typeface="Times New Roman" panose="02020603050405020304" pitchFamily="18" charset="0"/>
               </a:rPr>
-              <a:t>, 2026.</a:t>
+              <a:t/>
             </a:r>
           </a:p>
           <a:p>
@@ -36767,7 +36767,7 @@
                 <a:ea typeface="Arial Unicode MS" panose="020B0604020202020204" pitchFamily="34" charset="-122"/>
                 <a:cs typeface="Times New Roman" panose="02020603050405020304" pitchFamily="18" charset="0"/>
               </a:rPr>
-              <a:t>Cai Y*, </a:t>
+              <a:t/>
             </a:r>
             <a:r>
               <a:rPr lang="en-US" altLang="zh-CN" sz="1800" b="1" kern="100" dirty="0">
@@ -36776,7 +36776,7 @@
                 <a:ea typeface="Arial Unicode MS" panose="020B0604020202020204" pitchFamily="34" charset="-122"/>
                 <a:cs typeface="Times New Roman" panose="02020603050405020304" pitchFamily="18" charset="0"/>
               </a:rPr>
-              <a:t>Yin D</a:t>
+              <a:t/>
             </a:r>
             <a:r>
               <a:rPr lang="en-US" altLang="zh-CN" sz="1800" kern="100" dirty="0">
@@ -36785,7 +36785,7 @@
                 <a:ea typeface="Arial Unicode MS" panose="020B0604020202020204" pitchFamily="34" charset="-122"/>
                 <a:cs typeface="Times New Roman" panose="02020603050405020304" pitchFamily="18" charset="0"/>
               </a:rPr>
-              <a:t>*, Bai J*, et al. Toughening mechanism of macroscale heterogeneous soft materials: a systematic study from the perspective of energy release rate[J]. </a:t>
+              <a:t/>
             </a:r>
             <a:r>
               <a:rPr lang="en-US" altLang="zh-CN" sz="1800" b="1" i="1" kern="100" dirty="0">
@@ -36797,7 +36797,7 @@
                 <a:ea typeface="Arial Unicode MS" panose="020B0604020202020204" pitchFamily="34" charset="-122"/>
                 <a:cs typeface="Times New Roman" panose="02020603050405020304" pitchFamily="18" charset="0"/>
               </a:rPr>
-              <a:t>Journal of the Mechanics and Physics of Solids</a:t>
+              <a:t/>
             </a:r>
             <a:r>
               <a:rPr lang="en-US" altLang="zh-CN" sz="1800" kern="100" dirty="0">
@@ -36806,7 +36806,7 @@
                 <a:ea typeface="Arial Unicode MS" panose="020B0604020202020204" pitchFamily="34" charset="-122"/>
                 <a:cs typeface="Times New Roman" panose="02020603050405020304" pitchFamily="18" charset="0"/>
               </a:rPr>
-              <a:t>, 2025, 203: 106243.</a:t>
+              <a:t/>
             </a:r>
           </a:p>
           <a:p>
@@ -36824,7 +36824,7 @@
                 <a:ea typeface="Arial Unicode MS" panose="020B0604020202020204" pitchFamily="34" charset="-122"/>
                 <a:cs typeface="Times New Roman" panose="02020603050405020304" pitchFamily="18" charset="0"/>
               </a:rPr>
-              <a:t>Ma J, </a:t>
+              <a:t/>
             </a:r>
             <a:r>
               <a:rPr lang="en-US" altLang="zh-CN" sz="1800" b="1" kern="100" dirty="0">
@@ -36833,7 +36833,7 @@
                 <a:ea typeface="Arial Unicode MS" panose="020B0604020202020204" pitchFamily="34" charset="-122"/>
                 <a:cs typeface="Times New Roman" panose="02020603050405020304" pitchFamily="18" charset="0"/>
               </a:rPr>
-              <a:t>Yin D</a:t>
+              <a:t/>
             </a:r>
             <a:r>
               <a:rPr lang="en-US" altLang="zh-CN" sz="1800" kern="100" dirty="0">
@@ -36842,7 +36842,7 @@
                 <a:ea typeface="Arial Unicode MS" panose="020B0604020202020204" pitchFamily="34" charset="-122"/>
                 <a:cs typeface="Times New Roman" panose="02020603050405020304" pitchFamily="18" charset="0"/>
               </a:rPr>
-              <a:t>, Sheng Z, et al. Delayed tensile instabilities of hydrogels[J]. </a:t>
+              <a:t/>
             </a:r>
             <a:r>
               <a:rPr lang="en-US" altLang="zh-CN" sz="1800" b="1" i="1" kern="100" dirty="0">
@@ -36854,7 +36854,7 @@
                 <a:ea typeface="Arial Unicode MS" panose="020B0604020202020204" pitchFamily="34" charset="-122"/>
                 <a:cs typeface="Times New Roman" panose="02020603050405020304" pitchFamily="18" charset="0"/>
               </a:rPr>
-              <a:t>Journal of the Mechanics and Physics of Solids</a:t>
+              <a:t/>
             </a:r>
             <a:r>
               <a:rPr lang="en-US" altLang="zh-CN" sz="1800" kern="100" dirty="0">
@@ -36863,7 +36863,7 @@
                 <a:ea typeface="Arial Unicode MS" panose="020B0604020202020204" pitchFamily="34" charset="-122"/>
                 <a:cs typeface="Times New Roman" panose="02020603050405020304" pitchFamily="18" charset="0"/>
               </a:rPr>
-              <a:t>, 2022, 168: 105052.</a:t>
+              <a:t/>
             </a:r>
           </a:p>
           <a:p>
@@ -36881,7 +36881,7 @@
                 <a:ea typeface="Arial Unicode MS" panose="020B0604020202020204" pitchFamily="34" charset="-122"/>
                 <a:cs typeface="Times New Roman" panose="02020603050405020304" pitchFamily="18" charset="0"/>
               </a:rPr>
-              <a:t>Bai J, </a:t>
+              <a:t/>
             </a:r>
             <a:r>
               <a:rPr lang="en-US" altLang="zh-CN" sz="1800" b="1" kern="100" dirty="0">
@@ -36890,7 +36890,7 @@
                 <a:ea typeface="Arial Unicode MS" panose="020B0604020202020204" pitchFamily="34" charset="-122"/>
                 <a:cs typeface="Times New Roman" panose="02020603050405020304" pitchFamily="18" charset="0"/>
               </a:rPr>
-              <a:t>Yin D</a:t>
+              <a:t/>
             </a:r>
             <a:r>
               <a:rPr lang="en-US" altLang="zh-CN" sz="1800" kern="100" dirty="0">
@@ -36899,7 +36899,7 @@
                 <a:ea typeface="Arial Unicode MS" panose="020B0604020202020204" pitchFamily="34" charset="-122"/>
                 <a:cs typeface="Times New Roman" panose="02020603050405020304" pitchFamily="18" charset="0"/>
               </a:rPr>
-              <a:t>, Cai Y, et al. Dual-mode tension-shear model for soft staggered composites[J]. </a:t>
+              <a:t/>
             </a:r>
             <a:r>
               <a:rPr lang="en-US" altLang="zh-CN" sz="1800" b="1" i="1" kern="100" dirty="0">
@@ -36911,7 +36911,7 @@
                 <a:ea typeface="Arial Unicode MS" panose="020B0604020202020204" pitchFamily="34" charset="-122"/>
                 <a:cs typeface="Times New Roman" panose="02020603050405020304" pitchFamily="18" charset="0"/>
               </a:rPr>
-              <a:t>International Journal of Mechanical Sciences</a:t>
+              <a:t/>
             </a:r>
             <a:r>
               <a:rPr lang="en-US" altLang="zh-CN" sz="1800" kern="100" dirty="0">
@@ -36920,7 +36920,7 @@
                 <a:ea typeface="Arial Unicode MS" panose="020B0604020202020204" pitchFamily="34" charset="-122"/>
                 <a:cs typeface="Times New Roman" panose="02020603050405020304" pitchFamily="18" charset="0"/>
               </a:rPr>
-              <a:t>, 2025, 306: 110818.</a:t>
+              <a:t/>
             </a:r>
           </a:p>
           <a:p>
@@ -36938,7 +36938,7 @@
                 <a:ea typeface="Arial Unicode MS" panose="020B0604020202020204" pitchFamily="34" charset="-122"/>
                 <a:cs typeface="Times New Roman" panose="02020603050405020304" pitchFamily="18" charset="0"/>
               </a:rPr>
-              <a:t>Ma J*, Zhang X*, </a:t>
+              <a:t/>
             </a:r>
             <a:r>
               <a:rPr lang="en-US" altLang="zh-CN" sz="1800" b="1" kern="100" dirty="0">
@@ -36947,7 +36947,7 @@
                 <a:ea typeface="Arial Unicode MS" panose="020B0604020202020204" pitchFamily="34" charset="-122"/>
                 <a:cs typeface="Times New Roman" panose="02020603050405020304" pitchFamily="18" charset="0"/>
               </a:rPr>
-              <a:t>Yin D</a:t>
+              <a:t/>
             </a:r>
             <a:r>
               <a:rPr lang="en-US" altLang="zh-CN" sz="1800" kern="100" dirty="0">
@@ -36956,7 +36956,7 @@
                 <a:ea typeface="Arial Unicode MS" panose="020B0604020202020204" pitchFamily="34" charset="-122"/>
                 <a:cs typeface="Times New Roman" panose="02020603050405020304" pitchFamily="18" charset="0"/>
               </a:rPr>
-              <a:t>, et al. Designing </a:t>
+              <a:t/>
             </a:r>
             <a:r>
               <a:rPr lang="en-US" altLang="zh-CN" sz="1800" kern="100" dirty="0" err="1">
@@ -36965,7 +36965,7 @@
                 <a:ea typeface="Arial Unicode MS" panose="020B0604020202020204" pitchFamily="34" charset="-122"/>
                 <a:cs typeface="Times New Roman" panose="02020603050405020304" pitchFamily="18" charset="0"/>
               </a:rPr>
-              <a:t>Ultratough</a:t>
+              <a:t/>
             </a:r>
             <a:r>
               <a:rPr lang="en-US" altLang="zh-CN" sz="1800" kern="100" dirty="0">
@@ -36974,7 +36974,7 @@
                 <a:ea typeface="Arial Unicode MS" panose="020B0604020202020204" pitchFamily="34" charset="-122"/>
                 <a:cs typeface="Times New Roman" panose="02020603050405020304" pitchFamily="18" charset="0"/>
               </a:rPr>
-              <a:t> Single Network Hydrogels with Centimeter-Scale </a:t>
+              <a:t/>
             </a:r>
             <a:r>
               <a:rPr lang="en-US" altLang="zh-CN" sz="1800" kern="100" dirty="0" err="1">
@@ -36983,7 +36983,7 @@
                 <a:ea typeface="Arial Unicode MS" panose="020B0604020202020204" pitchFamily="34" charset="-122"/>
                 <a:cs typeface="Times New Roman" panose="02020603050405020304" pitchFamily="18" charset="0"/>
               </a:rPr>
-              <a:t>Fractocohesive</a:t>
+              <a:t/>
             </a:r>
             <a:r>
               <a:rPr lang="en-US" altLang="zh-CN" sz="1800" kern="100" dirty="0">
@@ -36992,7 +36992,7 @@
                 <a:ea typeface="Arial Unicode MS" panose="020B0604020202020204" pitchFamily="34" charset="-122"/>
                 <a:cs typeface="Times New Roman" panose="02020603050405020304" pitchFamily="18" charset="0"/>
               </a:rPr>
-              <a:t> Lengths via Inelastic Crack Blunting[J]. </a:t>
+              <a:t/>
             </a:r>
             <a:r>
               <a:rPr lang="en-US" altLang="zh-CN" sz="1800" b="1" i="1" kern="100" dirty="0">
@@ -37004,7 +37004,7 @@
                 <a:ea typeface="Arial Unicode MS" panose="020B0604020202020204" pitchFamily="34" charset="-122"/>
                 <a:cs typeface="Times New Roman" panose="02020603050405020304" pitchFamily="18" charset="0"/>
               </a:rPr>
-              <a:t>Advanced Materials</a:t>
+              <a:t/>
             </a:r>
             <a:r>
               <a:rPr lang="en-US" altLang="zh-CN" sz="1800" kern="100" dirty="0">
@@ -37013,7 +37013,7 @@
                 <a:ea typeface="Arial Unicode MS" panose="020B0604020202020204" pitchFamily="34" charset="-122"/>
                 <a:cs typeface="Times New Roman" panose="02020603050405020304" pitchFamily="18" charset="0"/>
               </a:rPr>
-              <a:t>, 2024: 2311795.</a:t>
+              <a:t/>
             </a:r>
           </a:p>
         </p:txBody>
